--- a/decks/englang-p1/englang-p1_ch1_know-the-paper.pptx
+++ b/decks/englang-p1/englang-p1_ch1_know-the-paper.pptx
@@ -124,29 +124,29 @@
   <p:extLst>
     <p:ext uri="{521415D9-36F7-43E2-AB2F-B90AF26B5E84}">
       <p14:sectionLst xmlns:p14="http://schemas.microsoft.com/office/powerpoint/2010/main">
-        <p14:section name="Opening" id="{428d7d56-052b-8f11-59ce-368d6d1992f3}">
+        <p14:section name="Opening" id="{e55a02d7-4f4c-1d7a-d5bf-47448288b67e}">
           <p14:sldIdLst>
             <p14:sldId id="256"/>
           </p14:sldIdLst>
         </p14:section>
-        <p14:section name="Gate" id="{f7b6894a-9186-9fc2-8fb1-cb52323afb87}">
+        <p14:section name="Gate" id="{644294ed-6001-2fa1-1715-d18148cce595}">
           <p14:sldIdLst>
             <p14:sldId id="257"/>
             <p14:sldId id="258"/>
           </p14:sldIdLst>
         </p14:section>
-        <p14:section name="Pre-teach" id="{62bb5576-6285-3fc5-4099-efdc73e35a50}">
+        <p14:section name="Pre-teach" id="{11f05f5a-7df8-f369-6386-c4a5a28c1608}">
           <p14:sldIdLst>
             <p14:sldId id="259"/>
           </p14:sldIdLst>
         </p14:section>
-        <p14:section name="Read-along" id="{36612830-33ca-efb1-8bf9-a53c2e8086dc}">
+        <p14:section name="Read-along" id="{c6a50ace-6e10-e423-0249-595154fe1681}">
           <p14:sldIdLst>
             <p14:sldId id="260"/>
             <p14:sldId id="261"/>
           </p14:sldIdLst>
         </p14:section>
-        <p14:section name="Teach" id="{b8134639-6103-f055-2669-d5bfd0a95e09}">
+        <p14:section name="Teach" id="{31889777-3e92-66b7-2877-e173a9513da9}">
           <p14:sldIdLst>
             <p14:sldId id="262"/>
             <p14:sldId id="263"/>
@@ -155,19 +155,19 @@
             <p14:sldId id="266"/>
           </p14:sldIdLst>
         </p14:section>
-        <p14:section name="Routes" id="{078267ab-e3dd-2238-9c93-da37de84353f}">
+        <p14:section name="Routes" id="{02f3fbe8-3d76-564f-3e2c-8a40324d6d49}">
           <p14:sldIdLst>
             <p14:sldId id="267"/>
             <p14:sldId id="268"/>
             <p14:sldId id="269"/>
           </p14:sldIdLst>
         </p14:section>
-        <p14:section name="Close" id="{c60a31de-fe91-ed25-a551-93d105aec2cc}">
+        <p14:section name="Close" id="{e8490549-d95a-60d2-f475-8cdb7e540992}">
           <p14:sldIdLst>
             <p14:sldId id="270"/>
           </p14:sldIdLst>
         </p14:section>
-        <p14:section name="Answers" id="{7ffcc545-9fc2-1c36-c54b-a5b9e23daefd}">
+        <p14:section name="Answers" id="{045bc0c1-881a-b4b0-e22f-32048a789c1e}">
           <p14:sldIdLst>
             <p14:sldId id="271"/>
             <p14:sldId id="272"/>
@@ -1139,7 +1139,7 @@
               <a:rPr lang="en-US" dirty="0"/>
               <a:t>Exit ticket — individual, silent, on a slip or mini-whiteboard. Recall before help: no notes, no lanes, no hints. Collect before pupils leave.
 Question: After a first read of Part 1 of ‘The Last Ferry’, which summary is most accurate?
-Answer: A   A girl waits alone on a windy harbour for the last ferry.. Nell sits alone at the end of the jetty in the wind, waiting for the last ferry of the year. The other summaries invent events that do not happen in Part 1.
+Answer: B   A girl waits alone on a windy harbour for the last ferry.. Nell sits alone at the end of the jetty in the wind, waiting for the last ferry of the year. The other summaries invent events that do not happen in Part 1.
 Source of this question: module 3 task ("First read: the 5Ws") from the manifest.
 Sort the slips: correct → ready to move on; incorrect → start next lesson in the pre-teach group, with the read-along and the Support lane. Same destination next time.</a:t>
             </a:r>
@@ -1412,7 +1412,7 @@
             <a:r>
               <a:rPr lang="en-US" dirty="0"/>
               <a:t>Answers — exit ticket: Exit ticket. Reveal the answer; pupils mark their own work in a different colour, then read the "why" together. Same destination for every lane, so one answer serves the whole class.
-Answer: A   A girl waits alone on a windy harbour for the last ferry.
+Answer: B   A girl waits alone on a windy harbour for the last ferry.
 Why: Nell sits alone at the end of the jetty in the wind, waiting for the last ferry of the year. The other summaries invent events that do not happen in Part 1.
 Ask a Support pupil to explain one step, and a Stretch pupil to share their extension.</a:t>
             </a:r>
@@ -1504,7 +1504,7 @@
               <a:rPr lang="en-US" dirty="0"/>
               <a:t>Do now — retrieval. Silent, no notes, no help: recall comes before any support. Give about four minutes.
 1. How long is Paper 1?  →  C   1 hour 45 minutes
-2. Which question is worth the most marks in Section A?  →  D   Question 4
+2. Which question is worth the most marks in Section A?  →  B   Question 4
 3. In Section B you have 45 minutes: about ___ minutes to plan and 40 minutes to write.  →  5
 Circulate: who gets 3/3 (Stretch route), 2/3 (Core), 0–1 (Support)? Use this to route pupils later in the lesson.</a:t>
             </a:r>
@@ -1596,7 +1596,7 @@
               <a:rPr lang="en-US" dirty="0"/>
               <a:t>Answers — pupils mark their own in a different colour, then hands up for 3/3, 2/3, 1/3.
 1. C   1 hour 45 minutes. Paper 1 lasts 1 hour 45 minutes: 15 reading, 40 on Section A, 45 on Section B and 5 checking.
-2. D   Question 4. Question 4 is worth 20 marks, more than Questions 1, 2 and 3 added together.
+2. B   Question 4. Question 4 is worth 20 marks, more than Questions 1, 2 and 3 added together.
 3. 5. Five minutes of planning leaves 40 minutes for writing.
 Say the route each score points to: 3/3 Stretch, 2/3 Core, 0–1 Support. Pupils may choose to move up.</a:t>
             </a:r>
@@ -8877,7 +8877,7 @@
                 <a:ea typeface="Calibri" pitchFamily="34" charset="-122"/>
                 <a:cs typeface="Calibri" pitchFamily="34" charset="-120"/>
               </a:rPr>
-              <a:t>A girl waits alone on a windy harbour for the last ferry.</a:t>
+              <a:t>A girl argues with her grandmother in a warm kitchen.</a:t>
             </a:r>
             <a:endParaRPr lang="en-US" sz="2400" dirty="0"/>
           </a:p>
@@ -8914,7 +8914,7 @@
                 <a:ea typeface="Calibri" pitchFamily="34" charset="-122"/>
                 <a:cs typeface="Calibri" pitchFamily="34" charset="-120"/>
               </a:rPr>
-              <a:t>A girl sails a fishing boat through a storm.</a:t>
+              <a:t>A girl waits alone on a windy harbour for the last ferry.</a:t>
             </a:r>
             <a:endParaRPr lang="en-US" sz="2400" dirty="0"/>
           </a:p>
@@ -8951,7 +8951,7 @@
                 <a:ea typeface="Calibri" pitchFamily="34" charset="-122"/>
                 <a:cs typeface="Calibri" pitchFamily="34" charset="-120"/>
               </a:rPr>
-              <a:t>A harbour master closes the café for the winter.</a:t>
+              <a:t>A girl sails a fishing boat through a storm.</a:t>
             </a:r>
             <a:endParaRPr lang="en-US" sz="2400" dirty="0"/>
           </a:p>
@@ -8988,7 +8988,7 @@
                 <a:ea typeface="Calibri" pitchFamily="34" charset="-122"/>
                 <a:cs typeface="Calibri" pitchFamily="34" charset="-120"/>
               </a:rPr>
-              <a:t>A girl argues with her grandmother in a warm kitchen.</a:t>
+              <a:t>A harbour master closes the café for the winter.</a:t>
             </a:r>
             <a:endParaRPr lang="en-US" sz="2400" dirty="0"/>
           </a:p>
@@ -10607,7 +10607,7 @@
                 <a:ea typeface="Cambria" pitchFamily="34" charset="-122"/>
                 <a:cs typeface="Cambria" pitchFamily="34" charset="-120"/>
               </a:rPr>
-              <a:t>A   A girl waits alone on a windy harbour for the last ferry.</a:t>
+              <a:t>B   A girl waits alone on a windy harbour for the last ferry.</a:t>
             </a:r>
             <a:endParaRPr lang="en-US" sz="1800" dirty="0"/>
           </a:p>
@@ -11141,7 +11141,7 @@
                 <a:ea typeface="Calibri" pitchFamily="34" charset="-122"/>
                 <a:cs typeface="Calibri" pitchFamily="34" charset="-120"/>
               </a:rPr>
-              <a:t>1 hour</a:t>
+              <a:t>2 hours</a:t>
             </a:r>
             <a:endParaRPr lang="en-US" sz="2400" dirty="0"/>
           </a:p>
@@ -11252,7 +11252,7 @@
                 <a:ea typeface="Calibri" pitchFamily="34" charset="-122"/>
                 <a:cs typeface="Calibri" pitchFamily="34" charset="-120"/>
               </a:rPr>
-              <a:t>2 hours</a:t>
+              <a:t>1 hour</a:t>
             </a:r>
             <a:endParaRPr lang="en-US" sz="2400" dirty="0"/>
           </a:p>
@@ -11456,7 +11456,7 @@
                 <a:ea typeface="Calibri" pitchFamily="34" charset="-122"/>
                 <a:cs typeface="Calibri" pitchFamily="34" charset="-120"/>
               </a:rPr>
-              <a:t>Question 1</a:t>
+              <a:t>Question 2</a:t>
             </a:r>
             <a:endParaRPr lang="en-US" sz="2400" dirty="0"/>
           </a:p>
@@ -11493,7 +11493,7 @@
                 <a:ea typeface="Calibri" pitchFamily="34" charset="-122"/>
                 <a:cs typeface="Calibri" pitchFamily="34" charset="-120"/>
               </a:rPr>
-              <a:t>Question 2</a:t>
+              <a:t>Question 4</a:t>
             </a:r>
             <a:endParaRPr lang="en-US" sz="2400" dirty="0"/>
           </a:p>
@@ -11530,7 +11530,7 @@
                 <a:ea typeface="Calibri" pitchFamily="34" charset="-122"/>
                 <a:cs typeface="Calibri" pitchFamily="34" charset="-120"/>
               </a:rPr>
-              <a:t>Question 3</a:t>
+              <a:t>Question 1</a:t>
             </a:r>
             <a:endParaRPr lang="en-US" sz="2400" dirty="0"/>
           </a:p>
@@ -11567,7 +11567,7 @@
                 <a:ea typeface="Calibri" pitchFamily="34" charset="-122"/>
                 <a:cs typeface="Calibri" pitchFamily="34" charset="-120"/>
               </a:rPr>
-              <a:t>Question 4</a:t>
+              <a:t>Question 3</a:t>
             </a:r>
             <a:endParaRPr lang="en-US" sz="2400" dirty="0"/>
           </a:p>
@@ -12416,7 +12416,7 @@
                 <a:ea typeface="Calibri" pitchFamily="34" charset="-122"/>
                 <a:cs typeface="Calibri" pitchFamily="34" charset="-120"/>
               </a:rPr>
-              <a:t>D   Question 4</a:t>
+              <a:t>B   Question 4</a:t>
             </a:r>
             <a:endParaRPr lang="en-US" sz="2200" dirty="0"/>
           </a:p>

--- a/decks/englang-p1/englang-p1_ch1_know-the-paper.pptx
+++ b/decks/englang-p1/englang-p1_ch1_know-the-paper.pptx
@@ -124,29 +124,29 @@
   <p:extLst>
     <p:ext uri="{521415D9-36F7-43E2-AB2F-B90AF26B5E84}">
       <p14:sectionLst xmlns:p14="http://schemas.microsoft.com/office/powerpoint/2010/main">
-        <p14:section name="Opening" id="{e55a02d7-4f4c-1d7a-d5bf-47448288b67e}">
+        <p14:section name="Opening" id="{d2579085-b598-cf56-3260-4a56f2191a74}">
           <p14:sldIdLst>
             <p14:sldId id="256"/>
           </p14:sldIdLst>
         </p14:section>
-        <p14:section name="Gate" id="{644294ed-6001-2fa1-1715-d18148cce595}">
+        <p14:section name="Gate" id="{4ee18cba-c73d-d08f-9843-15b40cb54e65}">
           <p14:sldIdLst>
             <p14:sldId id="257"/>
             <p14:sldId id="258"/>
           </p14:sldIdLst>
         </p14:section>
-        <p14:section name="Pre-teach" id="{11f05f5a-7df8-f369-6386-c4a5a28c1608}">
+        <p14:section name="Pre-teach" id="{c1c9fa4d-8330-7fa8-834b-3167592a7ff0}">
           <p14:sldIdLst>
             <p14:sldId id="259"/>
           </p14:sldIdLst>
         </p14:section>
-        <p14:section name="Read-along" id="{c6a50ace-6e10-e423-0249-595154fe1681}">
+        <p14:section name="Read-along" id="{6c7ce30d-40ed-9487-3e94-7878118417e6}">
           <p14:sldIdLst>
             <p14:sldId id="260"/>
             <p14:sldId id="261"/>
           </p14:sldIdLst>
         </p14:section>
-        <p14:section name="Teach" id="{31889777-3e92-66b7-2877-e173a9513da9}">
+        <p14:section name="Teach" id="{de7793e6-16f0-5985-7eab-83d96a726c27}">
           <p14:sldIdLst>
             <p14:sldId id="262"/>
             <p14:sldId id="263"/>
@@ -155,19 +155,19 @@
             <p14:sldId id="266"/>
           </p14:sldIdLst>
         </p14:section>
-        <p14:section name="Routes" id="{02f3fbe8-3d76-564f-3e2c-8a40324d6d49}">
+        <p14:section name="Routes" id="{5d252c07-ed90-5dbf-65f9-0666a1a2b91c}">
           <p14:sldIdLst>
             <p14:sldId id="267"/>
             <p14:sldId id="268"/>
             <p14:sldId id="269"/>
           </p14:sldIdLst>
         </p14:section>
-        <p14:section name="Close" id="{e8490549-d95a-60d2-f475-8cdb7e540992}">
+        <p14:section name="Close" id="{1490dbae-49fb-65e5-927e-411b4de01504}">
           <p14:sldIdLst>
             <p14:sldId id="270"/>
           </p14:sldIdLst>
         </p14:section>
-        <p14:section name="Answers" id="{045bc0c1-881a-b4b0-e22f-32048a789c1e}">
+        <p14:section name="Answers" id="{cefa3f28-04c0-7977-ea41-043bf1a03b82}">
           <p14:sldIdLst>
             <p14:sldId id="271"/>
             <p14:sldId id="272"/>
